--- a/docs/CommercialProposal.pptx
+++ b/docs/CommercialProposal.pptx
@@ -1264,7 +1264,7 @@
           <a:p>
             <a:r>
               <a:rPr lang="en-US" dirty="0"/>
-              <a:t>一気に全部やる承認をお願いするのではなく、Phase 1だけ先にやらせてください。そこで数字が出なければ引き返せます。Phase 2でアートの試作を作り、商品に見えるかを外部の目で判定します。</a:t>
+              <a:t>合計で最長9か月です。一気に全部やる承認をお願いするのではなく、Phase 1だけ先にやらせてください。そこで数字が出なければ引き返せます。Phase 2でアートの試作を作り、商品に見えるかを外部の目で判定します。期間は延ばさず、遅れたらスコープを削って9か月を守ります。</a:t>
             </a:r>
             <a:endParaRPr lang="en-US" dirty="0"/>
           </a:p>
@@ -1352,7 +1352,7 @@
           <a:p>
             <a:r>
               <a:rPr lang="en-US" dirty="0"/>
-              <a:t>アート・サウンドの外注はしません。開発体制も今のまま個人で続けます。ですので費用はほぼかからず、代わりに時間がかかります。7〜12人月を個人の稼働で消化するので、暦では9〜15か月です。</a:t>
+              <a:t>アート・サウンドの外注はしません。開発体制も今のまま個人で続けます。ですので費用はほぼかからず、代わりに時間がかかります。6〜8人月を個人の稼働で消化して、暦では最長9か月に収めます。</a:t>
             </a:r>
             <a:endParaRPr lang="en-US" dirty="0"/>
           </a:p>
@@ -1792,7 +1792,7 @@
           <a:p>
             <a:r>
               <a:rPr lang="en-US" dirty="0"/>
-              <a:t>結論を先に申し上げます。ゲームとしての中身は出来ています。足りないのは見た目・音・入口の体験と、販売のための事務まわりです。外注はせず個人体制を継続するので、必要なのはお金より時間です。</a:t>
+              <a:t>結論を先に申し上げます。ゲームとしての中身は出来ています。足りないのは見た目・音・入口の体験と、販売のための事務まわりです。外注はせず個人体制を継続するので、必要なのはお金より時間です。期間は9か月を上限に固定し、収まらないときはスコープを削って守ります。</a:t>
             </a:r>
             <a:endParaRPr lang="en-US" dirty="0"/>
           </a:p>
@@ -7449,7 +7449,7 @@
                 <a:ea typeface="Meiryo" pitchFamily="34" charset="-122"/>
                 <a:cs typeface="Meiryo" pitchFamily="34" charset="-120"/>
               </a:rPr>
-              <a:t>判断軸は「費用を回収できるか」ではなく「7〜12 人月の時間を投じるに値する手応えがあるか」</a:t>
+              <a:t>判断軸は「費用を回収できるか」ではなく「6〜8 人月の時間を投じるに値する手応えがあるか」</a:t>
             </a:r>
             <a:endParaRPr lang="en-US" sz="1500" dirty="0"/>
           </a:p>
@@ -8495,7 +8495,7 @@
                 <a:ea typeface="Meiryo" pitchFamily="34" charset="-122"/>
                 <a:cs typeface="Meiryo" pitchFamily="34" charset="-120"/>
               </a:rPr>
-              <a:t>ロードマップ ─ 合計 9〜15 か月・各段階で続行判断</a:t>
+              <a:t>ロードマップ ─ 上限 9 か月・各段階で続行判断</a:t>
             </a:r>
             <a:endParaRPr lang="en-US" sz="3000" dirty="0"/>
           </a:p>
@@ -8661,7 +8661,7 @@
                 <a:ea typeface="Meiryo" pitchFamily="34" charset="-122"/>
                 <a:cs typeface="Meiryo" pitchFamily="34" charset="-120"/>
               </a:rPr>
-              <a:t>1〜2 か月</a:t>
+              <a:t>1 か月</a:t>
             </a:r>
             <a:endParaRPr lang="en-US" sz="1150" dirty="0"/>
           </a:p>
@@ -8909,7 +8909,7 @@
                 <a:ea typeface="Meiryo" pitchFamily="34" charset="-122"/>
                 <a:cs typeface="Meiryo" pitchFamily="34" charset="-120"/>
               </a:rPr>
-              <a:t>1〜2 か月</a:t>
+              <a:t>1 か月</a:t>
             </a:r>
             <a:endParaRPr lang="en-US" sz="1150" dirty="0"/>
           </a:p>
@@ -9157,7 +9157,7 @@
                 <a:ea typeface="Meiryo" pitchFamily="34" charset="-122"/>
                 <a:cs typeface="Meiryo" pitchFamily="34" charset="-120"/>
               </a:rPr>
-              <a:t>5〜8 か月</a:t>
+              <a:t>4〜5 か月</a:t>
             </a:r>
             <a:endParaRPr lang="en-US" sz="1150" dirty="0"/>
           </a:p>
@@ -9405,7 +9405,7 @@
                 <a:ea typeface="Meiryo" pitchFamily="34" charset="-122"/>
                 <a:cs typeface="Meiryo" pitchFamily="34" charset="-120"/>
               </a:rPr>
-              <a:t>2〜3 か月</a:t>
+              <a:t>1.5〜2 か月</a:t>
             </a:r>
             <a:endParaRPr lang="en-US" sz="1150" dirty="0"/>
           </a:p>
@@ -9776,7 +9776,7 @@
                 <a:ea typeface="Meiryo" pitchFamily="34" charset="-122"/>
                 <a:cs typeface="Meiryo" pitchFamily="34" charset="-120"/>
               </a:rPr>
-              <a:t>Phase 2 が最大の関門 ─ 内製アートの試作が「有料商品に見える」と外部の目で判断できるか</a:t>
+              <a:t>期間は 9 か月で固定。遅れたら期間を延ばさず、Could → Should → キャンペーン簡略化の順にスコープを削る</a:t>
             </a:r>
             <a:endParaRPr lang="en-US" sz="1400" dirty="0"/>
           </a:p>
@@ -10585,7 +10585,7 @@
                 <a:ea typeface="Meiryo" pitchFamily="34" charset="-122"/>
                 <a:cs typeface="Meiryo" pitchFamily="34" charset="-120"/>
               </a:rPr>
-              <a:t>時間: 約 7 〜 12 人月</a:t>
+              <a:t>時間: 約 6 〜 8 人月</a:t>
             </a:r>
             <a:endParaRPr lang="en-US" sz="1800" dirty="0"/>
           </a:p>
@@ -10702,7 +10702,7 @@
                 <a:ea typeface="Meiryo" pitchFamily="34" charset="-122"/>
                 <a:cs typeface="Meiryo" pitchFamily="34" charset="-120"/>
               </a:rPr>
-              <a:t>2 〜 4 人月</a:t>
+              <a:t>2 〜 3 人月</a:t>
             </a:r>
             <a:endParaRPr lang="en-US" sz="1200" dirty="0"/>
           </a:p>
@@ -10780,7 +10780,7 @@
                 <a:ea typeface="Meiryo" pitchFamily="34" charset="-122"/>
                 <a:cs typeface="Meiryo" pitchFamily="34" charset="-120"/>
               </a:rPr>
-              <a:t>1 〜 2 人月</a:t>
+              <a:t>1 人月</a:t>
             </a:r>
             <a:endParaRPr lang="en-US" sz="1200" dirty="0"/>
           </a:p>
@@ -10858,7 +10858,7 @@
                 <a:ea typeface="Meiryo" pitchFamily="34" charset="-122"/>
                 <a:cs typeface="Meiryo" pitchFamily="34" charset="-120"/>
               </a:rPr>
-              <a:t>3 〜 4 人月</a:t>
+              <a:t>2 〜 3 人月</a:t>
             </a:r>
             <a:endParaRPr lang="en-US" sz="1200" dirty="0"/>
           </a:p>
@@ -10975,7 +10975,7 @@
                 <a:ea typeface="Meiryo" pitchFamily="34" charset="-122"/>
                 <a:cs typeface="Meiryo" pitchFamily="34" charset="-120"/>
               </a:rPr>
-              <a:t>個人稼働のため、暦では 9 〜 15 か月</a:t>
+              <a:t>個人稼働で月 0.8 〜 0.9 人月。暦では 7.5 〜 9 か月</a:t>
             </a:r>
             <a:endParaRPr lang="en-US" sz="1100" dirty="0"/>
           </a:p>
@@ -14959,7 +14959,7 @@
                 <a:ea typeface="Meiryo" pitchFamily="34" charset="-122"/>
                 <a:cs typeface="Meiryo" pitchFamily="34" charset="-120"/>
               </a:rPr>
-              <a:t>O-2 暦 9〜15 か月 ─ 鮮度とモチベーションの維持</a:t>
+              <a:t>O-2 6〜8 人月を暦 9 か月に収める ─ 遅れは即スコープ削減</a:t>
             </a:r>
             <a:endParaRPr lang="en-US" sz="1150" dirty="0"/>
           </a:p>
@@ -15881,7 +15881,7 @@
                           <a:ea typeface="Meiryo" pitchFamily="34" charset="-122"/>
                           <a:cs typeface="Meiryo" pitchFamily="34" charset="-120"/>
                         </a:rPr>
-                        <a:t>開発が長期化し鮮度・意欲が落ちる</a:t>
+                        <a:t>9 か月に収まらずスコープを削ることになる</a:t>
                       </a:r>
                       <a:endParaRPr lang="en-US" sz="1150" dirty="0">
                         <a:latin typeface="Meiryo" charset="0"/>
@@ -16017,7 +16017,7 @@
                           <a:ea typeface="Meiryo" pitchFamily="34" charset="-122"/>
                           <a:cs typeface="Meiryo" pitchFamily="34" charset="-120"/>
                         </a:rPr>
-                        <a:t>高</a:t>
+                        <a:t>中</a:t>
                       </a:r>
                       <a:endParaRPr lang="en-US" sz="1150" dirty="0">
                         <a:latin typeface="Meiryo" charset="0"/>
@@ -16085,7 +16085,7 @@
                           <a:ea typeface="Meiryo" pitchFamily="34" charset="-122"/>
                           <a:cs typeface="Meiryo" pitchFamily="34" charset="-120"/>
                         </a:rPr>
-                        <a:t>Phase を短く区切り、区切りごとに動くものを公開する</a:t>
+                        <a:t>削る順番を先に決めてある。Must は削らない</a:t>
                       </a:r>
                       <a:endParaRPr lang="en-US" sz="1150" dirty="0">
                         <a:latin typeface="Meiryo" charset="0"/>
@@ -16908,7 +16908,7 @@
                 <a:ea typeface="Meiryo" pitchFamily="34" charset="-122"/>
                 <a:cs typeface="Meiryo" pitchFamily="34" charset="-120"/>
               </a:rPr>
-              <a:t>追加 9〜15 か月で Steam 買い切り + ブラウザ体験版。アート/サウンドを含め全工程を内製し、個人体制を継続する</a:t>
+              <a:t>追加 最長 9 か月で Steam 買い切り + ブラウザ体験版。アート/サウンドを含め全工程を内製し、個人体制を継続する</a:t>
             </a:r>
             <a:endParaRPr lang="en-US" sz="1350" dirty="0"/>
           </a:p>
@@ -17478,7 +17478,7 @@
                 <a:ea typeface="Meiryo" pitchFamily="34" charset="-122"/>
                 <a:cs typeface="Meiryo" pitchFamily="34" charset="-120"/>
               </a:rPr>
-              <a:t>追加費用はほぼ発生しない</a:t>
+              <a:t>1 か月・追加費用はほぼ発生しない</a:t>
             </a:r>
             <a:endParaRPr lang="en-US" sz="1100" dirty="0"/>
           </a:p>
@@ -23019,7 +23019,7 @@
                 <a:ea typeface="Meiryo" pitchFamily="34" charset="-122"/>
                 <a:cs typeface="Meiryo" pitchFamily="34" charset="-120"/>
               </a:rPr>
-              <a:t>ここを飛ばして 7〜12 人月の時間を投じるのは危険。まず判断材料をつくる。</a:t>
+              <a:t>ここを飛ばして 6〜8 人月の時間を投じるのは危険。まず判断材料をつくる。</a:t>
             </a:r>
             <a:endParaRPr lang="en-US" sz="1250" dirty="0"/>
           </a:p>
